--- a/Design.pptx
+++ b/Design.pptx
@@ -7,6 +7,8 @@
   <p:sldIdLst>
     <p:sldId id="256" r:id="rId2"/>
     <p:sldId id="257" r:id="rId3"/>
+    <p:sldId id="258" r:id="rId4"/>
+    <p:sldId id="259" r:id="rId5"/>
   </p:sldIdLst>
   <p:sldSz cx="12192000" cy="6858000"/>
   <p:notesSz cx="6858000" cy="9144000"/>
@@ -260,7 +262,7 @@
           <a:p>
             <a:fld id="{5F5E6C3A-BA36-4666-86DB-E81361D1432B}" type="datetimeFigureOut">
               <a:rPr lang="en-GB" smtClean="0"/>
-              <a:t>18/03/2026</a:t>
+              <a:t>05/06/2026</a:t>
             </a:fld>
             <a:endParaRPr lang="en-GB"/>
           </a:p>
@@ -458,7 +460,7 @@
           <a:p>
             <a:fld id="{5F5E6C3A-BA36-4666-86DB-E81361D1432B}" type="datetimeFigureOut">
               <a:rPr lang="en-GB" smtClean="0"/>
-              <a:t>18/03/2026</a:t>
+              <a:t>05/06/2026</a:t>
             </a:fld>
             <a:endParaRPr lang="en-GB"/>
           </a:p>
@@ -666,7 +668,7 @@
           <a:p>
             <a:fld id="{5F5E6C3A-BA36-4666-86DB-E81361D1432B}" type="datetimeFigureOut">
               <a:rPr lang="en-GB" smtClean="0"/>
-              <a:t>18/03/2026</a:t>
+              <a:t>05/06/2026</a:t>
             </a:fld>
             <a:endParaRPr lang="en-GB"/>
           </a:p>
@@ -864,7 +866,7 @@
           <a:p>
             <a:fld id="{5F5E6C3A-BA36-4666-86DB-E81361D1432B}" type="datetimeFigureOut">
               <a:rPr lang="en-GB" smtClean="0"/>
-              <a:t>18/03/2026</a:t>
+              <a:t>05/06/2026</a:t>
             </a:fld>
             <a:endParaRPr lang="en-GB"/>
           </a:p>
@@ -1139,7 +1141,7 @@
           <a:p>
             <a:fld id="{5F5E6C3A-BA36-4666-86DB-E81361D1432B}" type="datetimeFigureOut">
               <a:rPr lang="en-GB" smtClean="0"/>
-              <a:t>18/03/2026</a:t>
+              <a:t>05/06/2026</a:t>
             </a:fld>
             <a:endParaRPr lang="en-GB"/>
           </a:p>
@@ -1404,7 +1406,7 @@
           <a:p>
             <a:fld id="{5F5E6C3A-BA36-4666-86DB-E81361D1432B}" type="datetimeFigureOut">
               <a:rPr lang="en-GB" smtClean="0"/>
-              <a:t>18/03/2026</a:t>
+              <a:t>05/06/2026</a:t>
             </a:fld>
             <a:endParaRPr lang="en-GB"/>
           </a:p>
@@ -1816,7 +1818,7 @@
           <a:p>
             <a:fld id="{5F5E6C3A-BA36-4666-86DB-E81361D1432B}" type="datetimeFigureOut">
               <a:rPr lang="en-GB" smtClean="0"/>
-              <a:t>18/03/2026</a:t>
+              <a:t>05/06/2026</a:t>
             </a:fld>
             <a:endParaRPr lang="en-GB"/>
           </a:p>
@@ -1957,7 +1959,7 @@
           <a:p>
             <a:fld id="{5F5E6C3A-BA36-4666-86DB-E81361D1432B}" type="datetimeFigureOut">
               <a:rPr lang="en-GB" smtClean="0"/>
-              <a:t>18/03/2026</a:t>
+              <a:t>05/06/2026</a:t>
             </a:fld>
             <a:endParaRPr lang="en-GB"/>
           </a:p>
@@ -2070,7 +2072,7 @@
           <a:p>
             <a:fld id="{5F5E6C3A-BA36-4666-86DB-E81361D1432B}" type="datetimeFigureOut">
               <a:rPr lang="en-GB" smtClean="0"/>
-              <a:t>18/03/2026</a:t>
+              <a:t>05/06/2026</a:t>
             </a:fld>
             <a:endParaRPr lang="en-GB"/>
           </a:p>
@@ -2381,7 +2383,7 @@
           <a:p>
             <a:fld id="{5F5E6C3A-BA36-4666-86DB-E81361D1432B}" type="datetimeFigureOut">
               <a:rPr lang="en-GB" smtClean="0"/>
-              <a:t>18/03/2026</a:t>
+              <a:t>05/06/2026</a:t>
             </a:fld>
             <a:endParaRPr lang="en-GB"/>
           </a:p>
@@ -2669,7 +2671,7 @@
           <a:p>
             <a:fld id="{5F5E6C3A-BA36-4666-86DB-E81361D1432B}" type="datetimeFigureOut">
               <a:rPr lang="en-GB" smtClean="0"/>
-              <a:t>18/03/2026</a:t>
+              <a:t>05/06/2026</a:t>
             </a:fld>
             <a:endParaRPr lang="en-GB"/>
           </a:p>
@@ -2910,7 +2912,7 @@
           <a:p>
             <a:fld id="{5F5E6C3A-BA36-4666-86DB-E81361D1432B}" type="datetimeFigureOut">
               <a:rPr lang="en-GB" smtClean="0"/>
-              <a:t>18/03/2026</a:t>
+              <a:t>05/06/2026</a:t>
             </a:fld>
             <a:endParaRPr lang="en-GB"/>
           </a:p>
@@ -3666,6 +3668,275 @@
 </p:sld>
 </file>
 
+<file path=ppt/slides/slide3.xml><?xml version="1.0" encoding="utf-8"?>
+<p:sld xmlns:a="http://schemas.openxmlformats.org/drawingml/2006/main" xmlns:r="http://schemas.openxmlformats.org/officeDocument/2006/relationships" xmlns:p="http://schemas.openxmlformats.org/presentationml/2006/main">
+  <p:cSld>
+    <p:spTree>
+      <p:nvGrpSpPr>
+        <p:cNvPr id="1" name=""/>
+        <p:cNvGrpSpPr/>
+        <p:nvPr/>
+      </p:nvGrpSpPr>
+      <p:grpSpPr>
+        <a:xfrm>
+          <a:off x="0" y="0"/>
+          <a:ext cx="0" cy="0"/>
+          <a:chOff x="0" y="0"/>
+          <a:chExt cx="0" cy="0"/>
+        </a:xfrm>
+      </p:grpSpPr>
+      <p:sp>
+        <p:nvSpPr>
+          <p:cNvPr id="4" name="TextBox 3">
+            <a:extLst>
+              <a:ext uri="{FF2B5EF4-FFF2-40B4-BE49-F238E27FC236}">
+                <a16:creationId xmlns:a16="http://schemas.microsoft.com/office/drawing/2014/main" id="{C85CD4E2-B422-F320-B264-3115E38EB459}"/>
+              </a:ext>
+            </a:extLst>
+          </p:cNvPr>
+          <p:cNvSpPr txBox="1"/>
+          <p:nvPr/>
+        </p:nvSpPr>
+        <p:spPr>
+          <a:xfrm>
+            <a:off x="685800" y="557784"/>
+            <a:ext cx="2312621" cy="3970318"/>
+          </a:xfrm>
+          <a:prstGeom prst="rect">
+            <a:avLst/>
+          </a:prstGeom>
+          <a:noFill/>
+        </p:spPr>
+        <p:txBody>
+          <a:bodyPr wrap="none" rtlCol="0">
+            <a:spAutoFit/>
+          </a:bodyPr>
+          <a:lstStyle/>
+          <a:p>
+            <a:r>
+              <a:rPr lang="en-GB" dirty="0"/>
+              <a:t>Data Files:</a:t>
+            </a:r>
+          </a:p>
+          <a:p>
+            <a:r>
+              <a:rPr lang="en-GB" dirty="0"/>
+              <a:t>   Landmarks</a:t>
+            </a:r>
+          </a:p>
+          <a:p>
+            <a:r>
+              <a:rPr lang="en-GB" dirty="0"/>
+              <a:t>   Paths</a:t>
+            </a:r>
+          </a:p>
+          <a:p>
+            <a:r>
+              <a:rPr lang="en-GB" dirty="0"/>
+              <a:t>   Maps</a:t>
+            </a:r>
+          </a:p>
+          <a:p>
+            <a:endParaRPr lang="en-GB" dirty="0"/>
+          </a:p>
+          <a:p>
+            <a:r>
+              <a:rPr lang="en-GB" dirty="0"/>
+              <a:t>Classes</a:t>
+            </a:r>
+          </a:p>
+          <a:p>
+            <a:r>
+              <a:rPr lang="en-GB" dirty="0"/>
+              <a:t>   Map</a:t>
+            </a:r>
+          </a:p>
+          <a:p>
+            <a:r>
+              <a:rPr lang="en-GB" dirty="0"/>
+              <a:t>   +</a:t>
+            </a:r>
+            <a:r>
+              <a:rPr lang="en-GB" dirty="0" err="1"/>
+              <a:t>currentMapDetails</a:t>
+            </a:r>
+            <a:endParaRPr lang="en-GB" dirty="0"/>
+          </a:p>
+          <a:p>
+            <a:r>
+              <a:rPr lang="en-GB" dirty="0"/>
+              <a:t>        +</a:t>
+            </a:r>
+            <a:r>
+              <a:rPr lang="en-GB" dirty="0" err="1"/>
+              <a:t>zoomLevel</a:t>
+            </a:r>
+            <a:endParaRPr lang="en-GB" dirty="0"/>
+          </a:p>
+          <a:p>
+            <a:r>
+              <a:rPr lang="en-GB" dirty="0"/>
+              <a:t>        +</a:t>
+            </a:r>
+            <a:r>
+              <a:rPr lang="en-GB" dirty="0" err="1"/>
+              <a:t>mapMode</a:t>
+            </a:r>
+            <a:endParaRPr lang="en-GB" dirty="0"/>
+          </a:p>
+          <a:p>
+            <a:r>
+              <a:rPr lang="en-GB" dirty="0"/>
+              <a:t>        +map</a:t>
+            </a:r>
+          </a:p>
+          <a:p>
+            <a:r>
+              <a:rPr lang="en-GB" dirty="0"/>
+              <a:t>               +</a:t>
+            </a:r>
+            <a:r>
+              <a:rPr lang="en-GB" dirty="0" err="1"/>
+              <a:t>topLeft</a:t>
+            </a:r>
+            <a:endParaRPr lang="en-GB" dirty="0"/>
+          </a:p>
+          <a:p>
+            <a:r>
+              <a:rPr lang="en-GB" dirty="0"/>
+              <a:t>               +</a:t>
+            </a:r>
+            <a:r>
+              <a:rPr lang="en-GB" dirty="0" err="1"/>
+              <a:t>bottomRight</a:t>
+            </a:r>
+            <a:endParaRPr lang="en-GB" dirty="0"/>
+          </a:p>
+          <a:p>
+            <a:r>
+              <a:rPr lang="en-GB" dirty="0"/>
+              <a:t>        </a:t>
+            </a:r>
+          </a:p>
+        </p:txBody>
+      </p:sp>
+    </p:spTree>
+    <p:extLst>
+      <p:ext uri="{BB962C8B-B14F-4D97-AF65-F5344CB8AC3E}">
+        <p14:creationId xmlns:p14="http://schemas.microsoft.com/office/powerpoint/2010/main" val="1059559854"/>
+      </p:ext>
+    </p:extLst>
+  </p:cSld>
+  <p:clrMapOvr>
+    <a:masterClrMapping/>
+  </p:clrMapOvr>
+</p:sld>
+</file>
+
+<file path=ppt/slides/slide4.xml><?xml version="1.0" encoding="utf-8"?>
+<p:sld xmlns:a="http://schemas.openxmlformats.org/drawingml/2006/main" xmlns:r="http://schemas.openxmlformats.org/officeDocument/2006/relationships" xmlns:p="http://schemas.openxmlformats.org/presentationml/2006/main">
+  <p:cSld>
+    <p:spTree>
+      <p:nvGrpSpPr>
+        <p:cNvPr id="1" name=""/>
+        <p:cNvGrpSpPr/>
+        <p:nvPr/>
+      </p:nvGrpSpPr>
+      <p:grpSpPr>
+        <a:xfrm>
+          <a:off x="0" y="0"/>
+          <a:ext cx="0" cy="0"/>
+          <a:chOff x="0" y="0"/>
+          <a:chExt cx="0" cy="0"/>
+        </a:xfrm>
+      </p:grpSpPr>
+      <p:cxnSp>
+        <p:nvCxnSpPr>
+          <p:cNvPr id="5" name="Straight Connector 4">
+            <a:extLst>
+              <a:ext uri="{FF2B5EF4-FFF2-40B4-BE49-F238E27FC236}">
+                <a16:creationId xmlns:a16="http://schemas.microsoft.com/office/drawing/2014/main" id="{CC1D991B-00F1-DCB2-123B-BFAB22B6A6C6}"/>
+              </a:ext>
+            </a:extLst>
+          </p:cNvPr>
+          <p:cNvCxnSpPr/>
+          <p:nvPr/>
+        </p:nvCxnSpPr>
+        <p:spPr>
+          <a:xfrm>
+            <a:off x="1357162" y="1434164"/>
+            <a:ext cx="3397718" cy="0"/>
+          </a:xfrm>
+          <a:prstGeom prst="line">
+            <a:avLst/>
+          </a:prstGeom>
+        </p:spPr>
+        <p:style>
+          <a:lnRef idx="2">
+            <a:schemeClr val="accent1"/>
+          </a:lnRef>
+          <a:fillRef idx="0">
+            <a:schemeClr val="accent1"/>
+          </a:fillRef>
+          <a:effectRef idx="1">
+            <a:schemeClr val="accent1"/>
+          </a:effectRef>
+          <a:fontRef idx="minor">
+            <a:schemeClr val="tx1"/>
+          </a:fontRef>
+        </p:style>
+      </p:cxnSp>
+      <p:cxnSp>
+        <p:nvCxnSpPr>
+          <p:cNvPr id="6" name="Straight Connector 5">
+            <a:extLst>
+              <a:ext uri="{FF2B5EF4-FFF2-40B4-BE49-F238E27FC236}">
+                <a16:creationId xmlns:a16="http://schemas.microsoft.com/office/drawing/2014/main" id="{FFA7FD54-C21D-B4D4-626E-14CEFEC910F1}"/>
+              </a:ext>
+            </a:extLst>
+          </p:cNvPr>
+          <p:cNvCxnSpPr>
+            <a:cxnSpLocks/>
+          </p:cNvCxnSpPr>
+          <p:nvPr/>
+        </p:nvCxnSpPr>
+        <p:spPr>
+          <a:xfrm>
+            <a:off x="1357162" y="1806020"/>
+            <a:ext cx="5756870" cy="0"/>
+          </a:xfrm>
+          <a:prstGeom prst="line">
+            <a:avLst/>
+          </a:prstGeom>
+        </p:spPr>
+        <p:style>
+          <a:lnRef idx="2">
+            <a:schemeClr val="accent1"/>
+          </a:lnRef>
+          <a:fillRef idx="0">
+            <a:schemeClr val="accent1"/>
+          </a:fillRef>
+          <a:effectRef idx="1">
+            <a:schemeClr val="accent1"/>
+          </a:effectRef>
+          <a:fontRef idx="minor">
+            <a:schemeClr val="tx1"/>
+          </a:fontRef>
+        </p:style>
+      </p:cxnSp>
+    </p:spTree>
+    <p:extLst>
+      <p:ext uri="{BB962C8B-B14F-4D97-AF65-F5344CB8AC3E}">
+        <p14:creationId xmlns:p14="http://schemas.microsoft.com/office/powerpoint/2010/main" val="2823198791"/>
+      </p:ext>
+    </p:extLst>
+  </p:cSld>
+  <p:clrMapOvr>
+    <a:masterClrMapping/>
+  </p:clrMapOvr>
+</p:sld>
+</file>
+
 <file path=ppt/theme/theme1.xml><?xml version="1.0" encoding="utf-8"?>
 <a:theme xmlns:a="http://schemas.openxmlformats.org/drawingml/2006/main" name="Office Theme">
   <a:themeElements>
